--- a/sessions/s02_the_20_questions_machine/teaching/slides/slides.pptx
+++ b/sessions/s02_the_20_questions_machine/teaching/slides/slides.pptx
@@ -1364,7 +1364,7 @@
               <a:rPr>
                 <a:latin typeface="Vazirmatn"/>
               </a:rPr>
-              <a:t>Deadline: before the problem-solving session.</a:t>
+              <a:t>Deadline: before the problem-solving session. ~20-30 min total. First judge run is all-red — that's normal.</a:t>
             </a:r>
           </a:p>
         </p:txBody>
@@ -1720,7 +1720,7 @@
               <a:rPr>
                 <a:latin typeface="Vazirmatn"/>
               </a:rPr>
-              <a:t>[RUN: PART 0 demo cell] Depth-1 vs depth-2, puppy verdict under each.</a:t>
+              <a:t>[RUN: PART 0 demo cell — once] Depth-1 vs depth-2, puppy verdict under each; the picture above is its output.</a:t>
             </a:r>
           </a:p>
           <a:p>
@@ -1744,7 +1744,7 @@
               <a:rPr>
                 <a:latin typeface="Vazirmatn"/>
               </a:rPr>
-              <a:t>FALLBACK: narrate from slides 7 and 10.</a:t>
+              <a:t>FALLBACK: narrate from this picture (it is the demo's output, committed in assets).</a:t>
             </a:r>
           </a:p>
         </p:txBody>
@@ -1914,7 +1914,7 @@
               <a:rPr>
                 <a:latin typeface="Vazirmatn"/>
               </a:rPr>
-              <a:t>INTERACTION (2 min): class shouts the elephant's door at each node on the projected tree.</a:t>
+              <a:t>[RUN: cell A1] Depth-1 tree picture — same mechanic as last session's red line.</a:t>
             </a:r>
           </a:p>
           <a:p>
@@ -1922,7 +1922,7 @@
               <a:rPr>
                 <a:latin typeface="Vazirmatn"/>
               </a:rPr>
-              <a:t>Trace: weight &gt;= 14 yes, ears &gt;= 8.25 yes, big-dog room.</a:t>
+              <a:t>SAY: "The line and this picture are the SAME thing. Only the drawing changed."</a:t>
             </a:r>
           </a:p>
           <a:p>
@@ -1930,7 +1930,7 @@
               <a:rPr>
                 <a:latin typeface="Vazirmatn"/>
               </a:rPr>
-              <a:t>SAY: "A leaf says ONE word for whatever reaches it — even a 3-ton elephant."</a:t>
+              <a:t>Seals continuity: Session 1's model was a tree all along.</a:t>
             </a:r>
           </a:p>
         </p:txBody>
@@ -2003,7 +2003,7 @@
               <a:rPr>
                 <a:latin typeface="Vazirmatn"/>
               </a:rPr>
-              <a:t>[RUN: cell A1] Depth-1 tree picture — same mechanic as last session's red line.</a:t>
+              <a:t>[15:00] Segment B. NAME: root = the first fork.</a:t>
             </a:r>
           </a:p>
           <a:p>
@@ -2011,7 +2011,7 @@
               <a:rPr>
                 <a:latin typeface="Vazirmatn"/>
               </a:rPr>
-              <a:t>SAY: "The line and this picture are the SAME thing. Only the drawing changed."</a:t>
+              <a:t>[RUN: cell A2] class reads the tree aloud door by door for a wolf: weight &gt;= 14 yes — big-dog room, one question only.</a:t>
             </a:r>
           </a:p>
           <a:p>
@@ -2019,7 +2019,23 @@
               <a:rPr>
                 <a:latin typeface="Vazirmatn"/>
               </a:rPr>
-              <a:t>Seals continuity: Session 1's model was a tree all along.</a:t>
+              <a:t>INTERACTION: their first questions from the hook — most asked weight too.</a:t>
+            </a:r>
+          </a:p>
+          <a:p>
+            <a:r>
+              <a:rPr>
+                <a:latin typeface="Vazirmatn"/>
+              </a:rPr>
+              <a:t>[MISCONCEPTION] the tree does not ask every animal the same number of questions — the heavy side ends after ONE question (already pure); only the light side gets the ear question.</a:t>
+            </a:r>
+          </a:p>
+          <a:p>
+            <a:r>
+              <a:rPr>
+                <a:latin typeface="Vazirmatn"/>
+              </a:rPr>
+              <a:t>Plant: "the machine picked exactly 14. Why? Next session."</a:t>
             </a:r>
           </a:p>
         </p:txBody>
@@ -2092,7 +2108,7 @@
               <a:rPr>
                 <a:latin typeface="Vazirmatn"/>
               </a:rPr>
-              <a:t>[15:00] Segment B. NAME: root = the first fork.</a:t>
+              <a:t>[RUN: cell A2] THE punchline picture — the machine's depth-2 tree (slide twin of the notebook's plot_tree).</a:t>
             </a:r>
           </a:p>
           <a:p>
@@ -2100,7 +2116,7 @@
               <a:rPr>
                 <a:latin typeface="Vazirmatn"/>
               </a:rPr>
-              <a:t>[RUN: cell A2] class reads both questions aloud for a wolf.</a:t>
+              <a:t>SAY: "One question split light from heavy. The heavy side was DONE — big dogs. Only the light side needed the ear question."</a:t>
             </a:r>
           </a:p>
           <a:p>
@@ -2108,7 +2124,7 @@
               <a:rPr>
                 <a:latin typeface="Vazirmatn"/>
               </a:rPr>
-              <a:t>INTERACTION: their first questions from the hook — most asked weight too.</a:t>
+              <a:t>ASK before running: "Which room does the puppy reach now?" — let them say it.</a:t>
             </a:r>
           </a:p>
           <a:p>
@@ -2116,7 +2132,7 @@
               <a:rPr>
                 <a:latin typeface="Vazirmatn"/>
               </a:rPr>
-              <a:t>Plant: "the machine picked exactly 14. Why? Next session."</a:t>
+              <a:t>NEXT: the elephant test on the very next slide — keep this picture in view.</a:t>
             </a:r>
           </a:p>
         </p:txBody>
@@ -2189,7 +2205,7 @@
               <a:rPr>
                 <a:latin typeface="Vazirmatn"/>
               </a:rPr>
-              <a:t>[RUN: cell A2] THE punchline picture — real plot_tree output.</a:t>
+              <a:t>[~22:00] INTERACTION (2 min): with the depth-2 tree still projected, the class shouts the elephant's door.</a:t>
             </a:r>
           </a:p>
           <a:p>
@@ -2197,7 +2213,7 @@
               <a:rPr>
                 <a:latin typeface="Vazirmatn"/>
               </a:rPr>
-              <a:t>SAY: "One question split light from heavy. The second split cats from small dogs."</a:t>
+              <a:t>Trace it live: weight ‎≥ ۱۴ ‎← بله — and the big-dog room is RIGHT THERE. The heavy side is already pure; the tree asks no second question.</a:t>
             </a:r>
           </a:p>
           <a:p>
@@ -2205,7 +2221,15 @@
               <a:rPr>
                 <a:latin typeface="Vazirmatn"/>
               </a:rPr>
-              <a:t>ASK before running: "Which room does the puppy reach now?" — let them say it.</a:t>
+              <a:t>SAY: "A leaf says ONE word for whatever reaches it — even a 3-ton elephant, after a single question."</a:t>
+            </a:r>
+          </a:p>
+          <a:p>
+            <a:r>
+              <a:rPr>
+                <a:latin typeface="Vazirmatn"/>
+              </a:rPr>
+              <a:t>HONEST POINT: the ear question lives on the LIGHT side only — the tree asks where animals are still mixed.</a:t>
             </a:r>
           </a:p>
         </p:txBody>
@@ -5207,7 +5231,7 @@
     <p:bg>
       <p:bgPr>
         <a:solidFill>
-          <a:srgbClr val="A9CCE8"/>
+          <a:srgbClr val="7DB6FF"/>
         </a:solidFill>
         <a:effectLst/>
       </p:bgPr>
@@ -5467,7 +5491,7 @@
     <p:bg>
       <p:bgPr>
         <a:solidFill>
-          <a:srgbClr val="EDF4FB"/>
+          <a:srgbClr val="EAF3FE"/>
         </a:solidFill>
         <a:effectLst/>
       </p:bgPr>
@@ -5579,7 +5603,7 @@
                 </a:solidFill>
                 <a:latin typeface="Vazirmatn"/>
               </a:rPr>
-              <a:t>وزن ≥ ۱۴؟ ← نه</a:t>
+              <a:t>وزن ‎≥ ۱۴‎؟ ← نه</a:t>
             </a:r>
           </a:p>
         </p:txBody>
@@ -5614,7 +5638,7 @@
                 </a:solidFill>
                 <a:latin typeface="Vazirmatn"/>
               </a:rPr>
-              <a:t>گوش ≥ ۸.۲۵؟ ← بله</a:t>
+              <a:t>گوش ‎≥ ۸.۲۵‎؟ ← بله</a:t>
             </a:r>
           </a:p>
         </p:txBody>
@@ -5703,7 +5727,7 @@
     <p:bg>
       <p:bgPr>
         <a:solidFill>
-          <a:srgbClr val="EDF4FB"/>
+          <a:srgbClr val="EAF3FE"/>
         </a:solidFill>
         <a:effectLst/>
       </p:bgPr>
@@ -5939,7 +5963,7 @@
     <p:bg>
       <p:bgPr>
         <a:solidFill>
-          <a:srgbClr val="DCEBF8"/>
+          <a:srgbClr val="D2E6FF"/>
         </a:solidFill>
         <a:effectLst/>
       </p:bgPr>
@@ -6012,7 +6036,7 @@
             <a:r>
               <a:rPr sz="3400" b="1">
                 <a:solidFill>
-                  <a:srgbClr val="2B6CB0"/>
+                  <a:srgbClr val="1F6FEB"/>
                 </a:solidFill>
                 <a:latin typeface="Vazirmatn"/>
               </a:rPr>
@@ -6070,7 +6094,7 @@
     <p:bg>
       <p:bgPr>
         <a:solidFill>
-          <a:srgbClr val="EDF4FB"/>
+          <a:srgbClr val="EAF3FE"/>
         </a:solidFill>
         <a:effectLst/>
       </p:bgPr>
@@ -6143,7 +6167,7 @@
             <a:r>
               <a:rPr sz="3400" b="1">
                 <a:solidFill>
-                  <a:srgbClr val="2B6CB0"/>
+                  <a:srgbClr val="1F6FEB"/>
                 </a:solidFill>
                 <a:latin typeface="Vazirmatn"/>
               </a:rPr>
@@ -6295,7 +6319,7 @@
     <p:bg>
       <p:bgPr>
         <a:solidFill>
-          <a:srgbClr val="EDF4FB"/>
+          <a:srgbClr val="EAF3FE"/>
         </a:solidFill>
         <a:effectLst/>
       </p:bgPr>
@@ -6531,7 +6555,7 @@
     <p:bg>
       <p:bgPr>
         <a:solidFill>
-          <a:srgbClr val="E3E9F0"/>
+          <a:srgbClr val="DCE9FB"/>
         </a:solidFill>
         <a:effectLst/>
       </p:bgPr>
@@ -6604,7 +6628,7 @@
             <a:r>
               <a:rPr sz="3400" b="1">
                 <a:solidFill>
-                  <a:srgbClr val="34495E"/>
+                  <a:srgbClr val="1A3A66"/>
                 </a:solidFill>
                 <a:latin typeface="Vazirmatn"/>
               </a:rPr>
@@ -6767,7 +6791,7 @@
     <p:bg>
       <p:bgPr>
         <a:solidFill>
-          <a:srgbClr val="EDF4FB"/>
+          <a:srgbClr val="EAF3FE"/>
         </a:solidFill>
         <a:effectLst/>
       </p:bgPr>
@@ -7062,7 +7086,7 @@
     <p:bg>
       <p:bgPr>
         <a:solidFill>
-          <a:srgbClr val="EDF4FB"/>
+          <a:srgbClr val="EAF3FE"/>
         </a:solidFill>
         <a:effectLst/>
       </p:bgPr>
@@ -7263,7 +7287,7 @@
     <p:bg>
       <p:bgPr>
         <a:solidFill>
-          <a:srgbClr val="EDF4FB"/>
+          <a:srgbClr val="EAF3FE"/>
         </a:solidFill>
         <a:effectLst/>
       </p:bgPr>
@@ -7480,7 +7504,7 @@
                 </a:solidFill>
                 <a:latin typeface="Vazirmatn"/>
               </a:rPr>
-              <a:t>مهلت: قبل از جلسهٔ بعدی (حل مسئله).</a:t>
+              <a:t>python judge/run.py s02_notebook.ipynb ← نمرهٔ فوری، هر وقت خواستی</a:t>
             </a:r>
           </a:p>
         </p:txBody>
@@ -7534,7 +7558,7 @@
     <p:bg>
       <p:bgPr>
         <a:solidFill>
-          <a:srgbClr val="A9CCE8"/>
+          <a:srgbClr val="D2E6FF"/>
         </a:solidFill>
         <a:effectLst/>
       </p:bgPr>
@@ -7605,9 +7629,9 @@
           <a:p>
             <a:pPr algn="r" rtl="1"/>
             <a:r>
-              <a:rPr sz="4000" b="1">
-                <a:solidFill>
-                  <a:srgbClr val="3C4043"/>
+              <a:rPr sz="3400" b="1">
+                <a:solidFill>
+                  <a:srgbClr val="1F6FEB"/>
                 </a:solidFill>
                 <a:latin typeface="Vazirmatn"/>
               </a:rPr>
@@ -7646,7 +7670,7 @@
                 </a:solidFill>
                 <a:latin typeface="Vazirmatn"/>
               </a:rPr>
-              <a:t>ماشین وزن ≥ ۱۴ را از کجا آورد؟</a:t>
+              <a:t>ماشین وزن ‎≥ ۱۴‎ را از کجا آورد؟</a:t>
             </a:r>
           </a:p>
         </p:txBody>
@@ -7794,7 +7818,7 @@
     <p:bg>
       <p:bgPr>
         <a:solidFill>
-          <a:srgbClr val="EDF4FB"/>
+          <a:srgbClr val="EAF3FE"/>
         </a:solidFill>
         <a:effectLst/>
       </p:bgPr>
@@ -7867,7 +7891,7 @@
             <a:r>
               <a:rPr sz="3400" b="1">
                 <a:solidFill>
-                  <a:srgbClr val="2B6CB0"/>
+                  <a:srgbClr val="1F6FEB"/>
                 </a:solidFill>
                 <a:latin typeface="Vazirmatn"/>
               </a:rPr>
@@ -8054,7 +8078,7 @@
     <p:bg>
       <p:bgPr>
         <a:solidFill>
-          <a:srgbClr val="EDF4FB"/>
+          <a:srgbClr val="EAF3FE"/>
         </a:solidFill>
         <a:effectLst/>
       </p:bgPr>
@@ -8127,7 +8151,7 @@
             <a:r>
               <a:rPr sz="3400" b="1">
                 <a:solidFill>
-                  <a:srgbClr val="2B6CB0"/>
+                  <a:srgbClr val="1F6FEB"/>
                 </a:solidFill>
                 <a:latin typeface="Vazirmatn"/>
               </a:rPr>
@@ -8255,7 +8279,7 @@
     <p:bg>
       <p:bgPr>
         <a:solidFill>
-          <a:srgbClr val="EDF4FB"/>
+          <a:srgbClr val="EAF3FE"/>
         </a:solidFill>
         <a:effectLst/>
       </p:bgPr>
@@ -8328,7 +8352,7 @@
             <a:r>
               <a:rPr sz="3400" b="1">
                 <a:solidFill>
-                  <a:srgbClr val="2B6CB0"/>
+                  <a:srgbClr val="1F6FEB"/>
                 </a:solidFill>
                 <a:latin typeface="Vazirmatn"/>
               </a:rPr>
@@ -8407,9 +8431,33 @@
           </a:p>
         </p:txBody>
       </p:sp>
-      <p:sp>
-        <p:nvSpPr>
-          <p:cNvPr id="6" name="TextBox 5"/>
+      <p:pic>
+        <p:nvPicPr>
+          <p:cNvPr id="6" name="Picture 5" descr="demo_depth1_vs_depth2.png"/>
+          <p:cNvPicPr>
+            <a:picLocks noChangeAspect="1"/>
+          </p:cNvPicPr>
+          <p:nvPr/>
+        </p:nvPicPr>
+        <p:blipFill>
+          <a:blip r:embed="rId2"/>
+          <a:stretch>
+            <a:fillRect/>
+          </a:stretch>
+        </p:blipFill>
+        <p:spPr>
+          <a:xfrm>
+            <a:off x="2346808" y="1005840"/>
+            <a:ext cx="7498079" cy="2645110"/>
+          </a:xfrm>
+          <a:prstGeom prst="rect">
+            <a:avLst/>
+          </a:prstGeom>
+        </p:spPr>
+      </p:pic>
+      <p:sp>
+        <p:nvSpPr>
+          <p:cNvPr id="7" name="TextBox 6"/>
           <p:cNvSpPr txBox="1"/>
           <p:nvPr/>
         </p:nvSpPr>
@@ -8456,7 +8504,7 @@
     <p:bg>
       <p:bgPr>
         <a:solidFill>
-          <a:srgbClr val="EDF4FB"/>
+          <a:srgbClr val="EAF3FE"/>
         </a:solidFill>
         <a:effectLst/>
       </p:bgPr>
@@ -8716,7 +8764,7 @@
     <p:bg>
       <p:bgPr>
         <a:solidFill>
-          <a:srgbClr val="EDF4FB"/>
+          <a:srgbClr val="EAF3FE"/>
         </a:solidFill>
         <a:effectLst/>
       </p:bgPr>
@@ -8793,14 +8841,38 @@
                 </a:solidFill>
                 <a:latin typeface="Vazirmatn"/>
               </a:rPr>
-              <a:t>فیل کدام در را می‌گذرد؟</a:t>
-            </a:r>
-          </a:p>
-        </p:txBody>
-      </p:sp>
-      <p:sp>
-        <p:nvSpPr>
-          <p:cNvPr id="4" name="TextBox 3"/>
+              <a:t>ماشینِ جلسهٔ ۱ = یک سؤال</a:t>
+            </a:r>
+          </a:p>
+        </p:txBody>
+      </p:sp>
+      <p:pic>
+        <p:nvPicPr>
+          <p:cNvPr id="4" name="Picture 3" descr="decision_tree_s02_d1.png"/>
+          <p:cNvPicPr>
+            <a:picLocks noChangeAspect="1"/>
+          </p:cNvPicPr>
+          <p:nvPr/>
+        </p:nvPicPr>
+        <p:blipFill>
+          <a:blip r:embed="rId2"/>
+          <a:stretch>
+            <a:fillRect/>
+          </a:stretch>
+        </p:blipFill>
+        <p:spPr>
+          <a:xfrm>
+            <a:off x="2536721" y="1005840"/>
+            <a:ext cx="7118252" cy="4206240"/>
+          </a:xfrm>
+          <a:prstGeom prst="rect">
+            <a:avLst/>
+          </a:prstGeom>
+        </p:spPr>
+      </p:pic>
+      <p:sp>
+        <p:nvSpPr>
+          <p:cNvPr id="5" name="TextBox 4"/>
           <p:cNvSpPr txBox="1"/>
           <p:nvPr/>
         </p:nvSpPr>
@@ -8828,14 +8900,14 @@
                 </a:solidFill>
                 <a:latin typeface="Vazirmatn"/>
               </a:rPr>
-              <a:t>وزن ≥ ۱۴؟ ← بله</a:t>
-            </a:r>
-          </a:p>
-        </p:txBody>
-      </p:sp>
-      <p:sp>
-        <p:nvSpPr>
-          <p:cNvPr id="5" name="TextBox 4"/>
+              <a:t>خطِ قرمزِ جلسهٔ ۱، به شکلِ درخت.</a:t>
+            </a:r>
+          </a:p>
+        </p:txBody>
+      </p:sp>
+      <p:sp>
+        <p:nvSpPr>
+          <p:cNvPr id="6" name="TextBox 5"/>
           <p:cNvSpPr txBox="1"/>
           <p:nvPr/>
         </p:nvSpPr>
@@ -8863,42 +8935,7 @@
                 </a:solidFill>
                 <a:latin typeface="Vazirmatn"/>
               </a:rPr>
-              <a:t>گوش ≥ ۸.۲۵؟ ← بله</a:t>
-            </a:r>
-          </a:p>
-        </p:txBody>
-      </p:sp>
-      <p:sp>
-        <p:nvSpPr>
-          <p:cNvPr id="6" name="TextBox 5"/>
-          <p:cNvSpPr txBox="1"/>
-          <p:nvPr/>
-        </p:nvSpPr>
-        <p:spPr>
-          <a:xfrm>
-            <a:off x="731520" y="2468880"/>
-            <a:ext cx="10728655" cy="640080"/>
-          </a:xfrm>
-          <a:prstGeom prst="rect">
-            <a:avLst/>
-          </a:prstGeom>
-          <a:noFill/>
-        </p:spPr>
-        <p:txBody>
-          <a:bodyPr wrap="square">
-            <a:spAutoFit/>
-          </a:bodyPr>
-          <a:lstStyle/>
-          <a:p>
-            <a:pPr algn="r" rtl="1"/>
-            <a:r>
-              <a:rPr sz="1800">
-                <a:solidFill>
-                  <a:srgbClr val="3C4043"/>
-                </a:solidFill>
-                <a:latin typeface="Vazirmatn"/>
-              </a:rPr>
-              <a:t>حکم: سگ بزرگ!</a:t>
+              <a:t>یک سؤال، دو در، دو حکم.</a:t>
             </a:r>
           </a:p>
         </p:txBody>
@@ -8952,7 +8989,7 @@
     <p:bg>
       <p:bgPr>
         <a:solidFill>
-          <a:srgbClr val="EDF4FB"/>
+          <a:srgbClr val="EAF3FE"/>
         </a:solidFill>
         <a:effectLst/>
       </p:bgPr>
@@ -9029,38 +9066,14 @@
                 </a:solidFill>
                 <a:latin typeface="Vazirmatn"/>
               </a:rPr>
-              <a:t>ماشینِ جلسهٔ ۱ = یک سؤال</a:t>
-            </a:r>
-          </a:p>
-        </p:txBody>
-      </p:sp>
-      <p:pic>
-        <p:nvPicPr>
-          <p:cNvPr id="4" name="Picture 3" descr="decision_tree_s02_d1.png"/>
-          <p:cNvPicPr>
-            <a:picLocks noChangeAspect="1"/>
-          </p:cNvPicPr>
-          <p:nvPr/>
-        </p:nvPicPr>
-        <p:blipFill>
-          <a:blip r:embed="rId2"/>
-          <a:stretch>
-            <a:fillRect/>
-          </a:stretch>
-        </p:blipFill>
-        <p:spPr>
-          <a:xfrm>
-            <a:off x="2346808" y="1005840"/>
-            <a:ext cx="7498079" cy="4089150"/>
-          </a:xfrm>
-          <a:prstGeom prst="rect">
-            <a:avLst/>
-          </a:prstGeom>
-        </p:spPr>
-      </p:pic>
-      <p:sp>
-        <p:nvSpPr>
-          <p:cNvPr id="5" name="TextBox 4"/>
+              <a:t>ریشه: اولین سؤال</a:t>
+            </a:r>
+          </a:p>
+        </p:txBody>
+      </p:sp>
+      <p:sp>
+        <p:nvSpPr>
+          <p:cNvPr id="4" name="TextBox 3"/>
           <p:cNvSpPr txBox="1"/>
           <p:nvPr/>
         </p:nvSpPr>
@@ -9088,14 +9101,14 @@
                 </a:solidFill>
                 <a:latin typeface="Vazirmatn"/>
               </a:rPr>
-              <a:t>خطِ قرمزِ جلسهٔ ۱، به شکلِ درخت.</a:t>
-            </a:r>
-          </a:p>
-        </p:txBody>
-      </p:sp>
-      <p:sp>
-        <p:nvSpPr>
-          <p:cNvPr id="6" name="TextBox 5"/>
+              <a:t>ماشین وزن ‎≥ ۱۴‎ را انتخاب کرد.</a:t>
+            </a:r>
+          </a:p>
+        </p:txBody>
+      </p:sp>
+      <p:sp>
+        <p:nvSpPr>
+          <p:cNvPr id="5" name="TextBox 4"/>
           <p:cNvSpPr txBox="1"/>
           <p:nvPr/>
         </p:nvSpPr>
@@ -9123,14 +9136,14 @@
                 </a:solidFill>
                 <a:latin typeface="Vazirmatn"/>
               </a:rPr>
-              <a:t>یک سؤال، دو در، دو حکم.</a:t>
-            </a:r>
-          </a:p>
-        </p:txBody>
-      </p:sp>
-      <p:sp>
-        <p:nvSpPr>
-          <p:cNvPr id="7" name="TextBox 6"/>
+              <a:t>شما در بازی، اول چه پرسیدید؟</a:t>
+            </a:r>
+          </a:p>
+        </p:txBody>
+      </p:sp>
+      <p:sp>
+        <p:nvSpPr>
+          <p:cNvPr id="6" name="TextBox 5"/>
           <p:cNvSpPr txBox="1"/>
           <p:nvPr/>
         </p:nvSpPr>
@@ -9177,7 +9190,7 @@
     <p:bg>
       <p:bgPr>
         <a:solidFill>
-          <a:srgbClr val="EDF4FB"/>
+          <a:srgbClr val="D2E6FF"/>
         </a:solidFill>
         <a:effectLst/>
       </p:bgPr>
@@ -9250,18 +9263,42 @@
             <a:r>
               <a:rPr sz="3400" b="1">
                 <a:solidFill>
-                  <a:srgbClr val="3C4043"/>
-                </a:solidFill>
-                <a:latin typeface="Vazirmatn"/>
-              </a:rPr>
-              <a:t>ریشه: اولین سؤال</a:t>
-            </a:r>
-          </a:p>
-        </p:txBody>
-      </p:sp>
-      <p:sp>
-        <p:nvSpPr>
-          <p:cNvPr id="4" name="TextBox 3"/>
+                  <a:srgbClr val="1F6FEB"/>
+                </a:solidFill>
+                <a:latin typeface="Vazirmatn"/>
+              </a:rPr>
+              <a:t>دو سؤال، سه اتاق</a:t>
+            </a:r>
+          </a:p>
+        </p:txBody>
+      </p:sp>
+      <p:pic>
+        <p:nvPicPr>
+          <p:cNvPr id="4" name="Picture 3" descr="decision_tree_s02_d2.png"/>
+          <p:cNvPicPr>
+            <a:picLocks noChangeAspect="1"/>
+          </p:cNvPicPr>
+          <p:nvPr/>
+        </p:nvPicPr>
+        <p:blipFill>
+          <a:blip r:embed="rId2"/>
+          <a:stretch>
+            <a:fillRect/>
+          </a:stretch>
+        </p:blipFill>
+        <p:spPr>
+          <a:xfrm>
+            <a:off x="2415387" y="1005840"/>
+            <a:ext cx="7360920" cy="4206240"/>
+          </a:xfrm>
+          <a:prstGeom prst="rect">
+            <a:avLst/>
+          </a:prstGeom>
+        </p:spPr>
+      </p:pic>
+      <p:sp>
+        <p:nvSpPr>
+          <p:cNvPr id="5" name="TextBox 4"/>
           <p:cNvSpPr txBox="1"/>
           <p:nvPr/>
         </p:nvSpPr>
@@ -9289,42 +9326,7 @@
                 </a:solidFill>
                 <a:latin typeface="Vazirmatn"/>
               </a:rPr>
-              <a:t>ماشین وزن ≥ ۱۴ را انتخاب کرد.</a:t>
-            </a:r>
-          </a:p>
-        </p:txBody>
-      </p:sp>
-      <p:sp>
-        <p:nvSpPr>
-          <p:cNvPr id="5" name="TextBox 4"/>
-          <p:cNvSpPr txBox="1"/>
-          <p:nvPr/>
-        </p:nvSpPr>
-        <p:spPr>
-          <a:xfrm>
-            <a:off x="731520" y="1965960"/>
-            <a:ext cx="10728655" cy="640080"/>
-          </a:xfrm>
-          <a:prstGeom prst="rect">
-            <a:avLst/>
-          </a:prstGeom>
-          <a:noFill/>
-        </p:spPr>
-        <p:txBody>
-          <a:bodyPr wrap="square">
-            <a:spAutoFit/>
-          </a:bodyPr>
-          <a:lstStyle/>
-          <a:p>
-            <a:pPr algn="r" rtl="1"/>
-            <a:r>
-              <a:rPr sz="1800">
-                <a:solidFill>
-                  <a:srgbClr val="3C4043"/>
-                </a:solidFill>
-                <a:latin typeface="Vazirmatn"/>
-              </a:rPr>
-              <a:t>شما در بازی، اول چه پرسیدید؟</a:t>
+              <a:t>سگ‌های بزرگ با یک سؤال؛ گربه و سگ کوچک با سؤال دوم.</a:t>
             </a:r>
           </a:p>
         </p:txBody>
@@ -9378,7 +9380,7 @@
     <p:bg>
       <p:bgPr>
         <a:solidFill>
-          <a:srgbClr val="DCEBF8"/>
+          <a:srgbClr val="EAF3FE"/>
         </a:solidFill>
         <a:effectLst/>
       </p:bgPr>
@@ -9451,42 +9453,18 @@
             <a:r>
               <a:rPr sz="3400" b="1">
                 <a:solidFill>
-                  <a:srgbClr val="2B6CB0"/>
-                </a:solidFill>
-                <a:latin typeface="Vazirmatn"/>
-              </a:rPr>
-              <a:t>دو سؤال، سه اتاق</a:t>
-            </a:r>
-          </a:p>
-        </p:txBody>
-      </p:sp>
-      <p:pic>
-        <p:nvPicPr>
-          <p:cNvPr id="4" name="Picture 3" descr="decision_tree_s02_d2.png"/>
-          <p:cNvPicPr>
-            <a:picLocks noChangeAspect="1"/>
-          </p:cNvPicPr>
-          <p:nvPr/>
-        </p:nvPicPr>
-        <p:blipFill>
-          <a:blip r:embed="rId2"/>
-          <a:stretch>
-            <a:fillRect/>
-          </a:stretch>
-        </p:blipFill>
-        <p:spPr>
-          <a:xfrm>
-            <a:off x="2346808" y="1005840"/>
-            <a:ext cx="7498079" cy="3967404"/>
-          </a:xfrm>
-          <a:prstGeom prst="rect">
-            <a:avLst/>
-          </a:prstGeom>
-        </p:spPr>
-      </p:pic>
-      <p:sp>
-        <p:nvSpPr>
-          <p:cNvPr id="5" name="TextBox 4"/>
+                  <a:srgbClr val="3C4043"/>
+                </a:solidFill>
+                <a:latin typeface="Vazirmatn"/>
+              </a:rPr>
+              <a:t>فیل کدام در را می‌گذرد؟</a:t>
+            </a:r>
+          </a:p>
+        </p:txBody>
+      </p:sp>
+      <p:sp>
+        <p:nvSpPr>
+          <p:cNvPr id="4" name="TextBox 3"/>
           <p:cNvSpPr txBox="1"/>
           <p:nvPr/>
         </p:nvSpPr>
@@ -9514,7 +9492,42 @@
                 </a:solidFill>
                 <a:latin typeface="Vazirmatn"/>
               </a:rPr>
-              <a:t>گربه‌ها، سگ‌های بزرگ، سگ‌های کوچک — هر کدام اتاقِ خودشان.</a:t>
+              <a:t>وزن ‎≥ ۱۴‎؟ ← بله</a:t>
+            </a:r>
+          </a:p>
+        </p:txBody>
+      </p:sp>
+      <p:sp>
+        <p:nvSpPr>
+          <p:cNvPr id="5" name="TextBox 4"/>
+          <p:cNvSpPr txBox="1"/>
+          <p:nvPr/>
+        </p:nvSpPr>
+        <p:spPr>
+          <a:xfrm>
+            <a:off x="731520" y="1965960"/>
+            <a:ext cx="10728655" cy="640080"/>
+          </a:xfrm>
+          <a:prstGeom prst="rect">
+            <a:avLst/>
+          </a:prstGeom>
+          <a:noFill/>
+        </p:spPr>
+        <p:txBody>
+          <a:bodyPr wrap="square">
+            <a:spAutoFit/>
+          </a:bodyPr>
+          <a:lstStyle/>
+          <a:p>
+            <a:pPr algn="r" rtl="1"/>
+            <a:r>
+              <a:rPr sz="1800">
+                <a:solidFill>
+                  <a:srgbClr val="3C4043"/>
+                </a:solidFill>
+                <a:latin typeface="Vazirmatn"/>
+              </a:rPr>
+              <a:t>حکم: سگ بزرگ — بدون هیچ سؤال دوم!</a:t>
             </a:r>
           </a:p>
         </p:txBody>

--- a/sessions/s02_the_20_questions_machine/teaching/slides/slides.pptx
+++ b/sessions/s02_the_20_questions_machine/teaching/slides/slides.pptx
@@ -1275,7 +1275,7 @@
               <a:rPr>
                 <a:latin typeface="Vazirmatn"/>
               </a:rPr>
-              <a:t>Show the judge command: python judge/run.py s02_notebook.ipynb</a:t>
+              <a:t>Show how at-home notebooks get judged (instructor-only run): python judge/run.py s02_notebook.ipynb</a:t>
             </a:r>
           </a:p>
         </p:txBody>
@@ -7477,41 +7477,6 @@
       <p:sp>
         <p:nvSpPr>
           <p:cNvPr id="7" name="TextBox 6"/>
-          <p:cNvSpPr txBox="1"/>
-          <p:nvPr/>
-        </p:nvSpPr>
-        <p:spPr>
-          <a:xfrm>
-            <a:off x="731520" y="2697480"/>
-            <a:ext cx="10728655" cy="640080"/>
-          </a:xfrm>
-          <a:prstGeom prst="rect">
-            <a:avLst/>
-          </a:prstGeom>
-          <a:noFill/>
-        </p:spPr>
-        <p:txBody>
-          <a:bodyPr wrap="square">
-            <a:spAutoFit/>
-          </a:bodyPr>
-          <a:lstStyle/>
-          <a:p>
-            <a:pPr algn="r" rtl="1"/>
-            <a:r>
-              <a:rPr sz="1800">
-                <a:solidFill>
-                  <a:srgbClr val="3C4043"/>
-                </a:solidFill>
-                <a:latin typeface="Vazirmatn"/>
-              </a:rPr>
-              <a:t>python judge/run.py s02_notebook.ipynb ← نمرهٔ فوری، هر وقت خواستی</a:t>
-            </a:r>
-          </a:p>
-        </p:txBody>
-      </p:sp>
-      <p:sp>
-        <p:nvSpPr>
-          <p:cNvPr id="8" name="TextBox 7"/>
           <p:cNvSpPr txBox="1"/>
           <p:nvPr/>
         </p:nvSpPr>
